--- a/DS_Presentation.pptx
+++ b/DS_Presentation.pptx
@@ -6,6 +6,7 @@
   </p:sldMasterIdLst>
   <p:sldIdLst>
     <p:sldId id="257" r:id="rId2"/>
+    <p:sldId id="258" r:id="rId3"/>
   </p:sldIdLst>
   <p:sldSz cx="12192000" cy="6858000"/>
   <p:notesSz cx="6858000" cy="9144000"/>
@@ -104,6 +105,11 @@
       </a:defRPr>
     </a:lvl9pPr>
   </p:defaultTextStyle>
+  <p:extLst>
+    <p:ext uri="{EFAFB233-063F-42B5-8137-9DF3F51BA10A}">
+      <p15:sldGuideLst xmlns:p15="http://schemas.microsoft.com/office/powerpoint/2012/main"/>
+    </p:ext>
+  </p:extLst>
 </p:presentation>
 </file>
 
@@ -119,8 +125,8 @@
 <pc:chgInfo xmlns:a="http://schemas.openxmlformats.org/drawingml/2006/main" xmlns:r="http://schemas.openxmlformats.org/officeDocument/2006/relationships" xmlns:ac="http://schemas.microsoft.com/office/drawing/2013/main/command" xmlns:pc="http://schemas.microsoft.com/office/powerpoint/2013/main/command">
   <pc:docChgLst>
     <pc:chgData name="Iris YiJun" userId="4b3e3e62671a3263" providerId="LiveId" clId="{C4D3496C-EB9A-46BB-9531-42E669AD36B0}"/>
-    <pc:docChg chg="modSld">
-      <pc:chgData name="Iris YiJun" userId="4b3e3e62671a3263" providerId="LiveId" clId="{C4D3496C-EB9A-46BB-9531-42E669AD36B0}" dt="2025-11-16T11:46:40.773" v="4" actId="1037"/>
+    <pc:docChg chg="addSld modSld">
+      <pc:chgData name="Iris YiJun" userId="4b3e3e62671a3263" providerId="LiveId" clId="{C4D3496C-EB9A-46BB-9531-42E669AD36B0}" dt="2025-11-17T22:15:18.668" v="14" actId="12788"/>
       <pc:docMkLst>
         <pc:docMk/>
       </pc:docMkLst>
@@ -219,6 +225,21 @@
           </ac:cxnSpMkLst>
         </pc:cxnChg>
       </pc:sldChg>
+      <pc:sldChg chg="addSp modSp new mod">
+        <pc:chgData name="Iris YiJun" userId="4b3e3e62671a3263" providerId="LiveId" clId="{C4D3496C-EB9A-46BB-9531-42E669AD36B0}" dt="2025-11-17T22:15:18.668" v="14" actId="12788"/>
+        <pc:sldMkLst>
+          <pc:docMk/>
+          <pc:sldMk cId="1781927036" sldId="258"/>
+        </pc:sldMkLst>
+        <pc:picChg chg="add mod">
+          <ac:chgData name="Iris YiJun" userId="4b3e3e62671a3263" providerId="LiveId" clId="{C4D3496C-EB9A-46BB-9531-42E669AD36B0}" dt="2025-11-17T22:15:18.668" v="14" actId="12788"/>
+          <ac:picMkLst>
+            <pc:docMk/>
+            <pc:sldMk cId="1781927036" sldId="258"/>
+            <ac:picMk id="3" creationId="{5967FDEB-C252-0DC7-6020-D427BEA5038D}"/>
+          </ac:picMkLst>
+        </pc:picChg>
+      </pc:sldChg>
     </pc:docChg>
   </pc:docChgLst>
 </pc:chgInfo>
@@ -373,7 +394,7 @@
           <a:p>
             <a:fld id="{E03459B8-E6CC-4D42-B27F-A904A2CA39EC}" type="datetimeFigureOut">
               <a:rPr lang="en-SG" smtClean="0"/>
-              <a:t>16/11/2025</a:t>
+              <a:t>17/11/2025</a:t>
             </a:fld>
             <a:endParaRPr lang="en-SG"/>
           </a:p>
@@ -573,7 +594,7 @@
           <a:p>
             <a:fld id="{E03459B8-E6CC-4D42-B27F-A904A2CA39EC}" type="datetimeFigureOut">
               <a:rPr lang="en-SG" smtClean="0"/>
-              <a:t>16/11/2025</a:t>
+              <a:t>17/11/2025</a:t>
             </a:fld>
             <a:endParaRPr lang="en-SG"/>
           </a:p>
@@ -783,7 +804,7 @@
           <a:p>
             <a:fld id="{E03459B8-E6CC-4D42-B27F-A904A2CA39EC}" type="datetimeFigureOut">
               <a:rPr lang="en-SG" smtClean="0"/>
-              <a:t>16/11/2025</a:t>
+              <a:t>17/11/2025</a:t>
             </a:fld>
             <a:endParaRPr lang="en-SG"/>
           </a:p>
@@ -983,7 +1004,7 @@
           <a:p>
             <a:fld id="{E03459B8-E6CC-4D42-B27F-A904A2CA39EC}" type="datetimeFigureOut">
               <a:rPr lang="en-SG" smtClean="0"/>
-              <a:t>16/11/2025</a:t>
+              <a:t>17/11/2025</a:t>
             </a:fld>
             <a:endParaRPr lang="en-SG"/>
           </a:p>
@@ -1259,7 +1280,7 @@
           <a:p>
             <a:fld id="{E03459B8-E6CC-4D42-B27F-A904A2CA39EC}" type="datetimeFigureOut">
               <a:rPr lang="en-SG" smtClean="0"/>
-              <a:t>16/11/2025</a:t>
+              <a:t>17/11/2025</a:t>
             </a:fld>
             <a:endParaRPr lang="en-SG"/>
           </a:p>
@@ -1527,7 +1548,7 @@
           <a:p>
             <a:fld id="{E03459B8-E6CC-4D42-B27F-A904A2CA39EC}" type="datetimeFigureOut">
               <a:rPr lang="en-SG" smtClean="0"/>
-              <a:t>16/11/2025</a:t>
+              <a:t>17/11/2025</a:t>
             </a:fld>
             <a:endParaRPr lang="en-SG"/>
           </a:p>
@@ -1942,7 +1963,7 @@
           <a:p>
             <a:fld id="{E03459B8-E6CC-4D42-B27F-A904A2CA39EC}" type="datetimeFigureOut">
               <a:rPr lang="en-SG" smtClean="0"/>
-              <a:t>16/11/2025</a:t>
+              <a:t>17/11/2025</a:t>
             </a:fld>
             <a:endParaRPr lang="en-SG"/>
           </a:p>
@@ -2084,7 +2105,7 @@
           <a:p>
             <a:fld id="{E03459B8-E6CC-4D42-B27F-A904A2CA39EC}" type="datetimeFigureOut">
               <a:rPr lang="en-SG" smtClean="0"/>
-              <a:t>16/11/2025</a:t>
+              <a:t>17/11/2025</a:t>
             </a:fld>
             <a:endParaRPr lang="en-SG"/>
           </a:p>
@@ -2197,7 +2218,7 @@
           <a:p>
             <a:fld id="{E03459B8-E6CC-4D42-B27F-A904A2CA39EC}" type="datetimeFigureOut">
               <a:rPr lang="en-SG" smtClean="0"/>
-              <a:t>16/11/2025</a:t>
+              <a:t>17/11/2025</a:t>
             </a:fld>
             <a:endParaRPr lang="en-SG"/>
           </a:p>
@@ -2510,7 +2531,7 @@
           <a:p>
             <a:fld id="{E03459B8-E6CC-4D42-B27F-A904A2CA39EC}" type="datetimeFigureOut">
               <a:rPr lang="en-SG" smtClean="0"/>
-              <a:t>16/11/2025</a:t>
+              <a:t>17/11/2025</a:t>
             </a:fld>
             <a:endParaRPr lang="en-SG"/>
           </a:p>
@@ -2799,7 +2820,7 @@
           <a:p>
             <a:fld id="{E03459B8-E6CC-4D42-B27F-A904A2CA39EC}" type="datetimeFigureOut">
               <a:rPr lang="en-SG" smtClean="0"/>
-              <a:t>16/11/2025</a:t>
+              <a:t>17/11/2025</a:t>
             </a:fld>
             <a:endParaRPr lang="en-SG"/>
           </a:p>
@@ -3042,7 +3063,7 @@
           <a:p>
             <a:fld id="{E03459B8-E6CC-4D42-B27F-A904A2CA39EC}" type="datetimeFigureOut">
               <a:rPr lang="en-SG" smtClean="0"/>
-              <a:t>16/11/2025</a:t>
+              <a:t>17/11/2025</a:t>
             </a:fld>
             <a:endParaRPr lang="en-SG"/>
           </a:p>
@@ -4674,6 +4695,66 @@
     <p:extLst>
       <p:ext uri="{BB962C8B-B14F-4D97-AF65-F5344CB8AC3E}">
         <p14:creationId xmlns:p14="http://schemas.microsoft.com/office/powerpoint/2010/main" val="2321414964"/>
+      </p:ext>
+    </p:extLst>
+  </p:cSld>
+  <p:clrMapOvr>
+    <a:masterClrMapping/>
+  </p:clrMapOvr>
+</p:sld>
+</file>
+
+<file path=ppt/slides/slide2.xml><?xml version="1.0" encoding="utf-8"?>
+<p:sld xmlns:a="http://schemas.openxmlformats.org/drawingml/2006/main" xmlns:r="http://schemas.openxmlformats.org/officeDocument/2006/relationships" xmlns:p="http://schemas.openxmlformats.org/presentationml/2006/main">
+  <p:cSld>
+    <p:spTree>
+      <p:nvGrpSpPr>
+        <p:cNvPr id="1" name=""/>
+        <p:cNvGrpSpPr/>
+        <p:nvPr/>
+      </p:nvGrpSpPr>
+      <p:grpSpPr>
+        <a:xfrm>
+          <a:off x="0" y="0"/>
+          <a:ext cx="0" cy="0"/>
+          <a:chOff x="0" y="0"/>
+          <a:chExt cx="0" cy="0"/>
+        </a:xfrm>
+      </p:grpSpPr>
+      <p:pic>
+        <p:nvPicPr>
+          <p:cNvPr id="3" name="Picture 2">
+            <a:extLst>
+              <a:ext uri="{FF2B5EF4-FFF2-40B4-BE49-F238E27FC236}">
+                <a16:creationId xmlns:a16="http://schemas.microsoft.com/office/drawing/2014/main" id="{5967FDEB-C252-0DC7-6020-D427BEA5038D}"/>
+              </a:ext>
+            </a:extLst>
+          </p:cNvPr>
+          <p:cNvPicPr>
+            <a:picLocks noChangeAspect="1"/>
+          </p:cNvPicPr>
+          <p:nvPr/>
+        </p:nvPicPr>
+        <p:blipFill>
+          <a:blip r:embed="rId2"/>
+          <a:stretch>
+            <a:fillRect/>
+          </a:stretch>
+        </p:blipFill>
+        <p:spPr>
+          <a:xfrm>
+            <a:off x="757248" y="99000"/>
+            <a:ext cx="10677504" cy="6660000"/>
+          </a:xfrm>
+          <a:prstGeom prst="rect">
+            <a:avLst/>
+          </a:prstGeom>
+        </p:spPr>
+      </p:pic>
+    </p:spTree>
+    <p:extLst>
+      <p:ext uri="{BB962C8B-B14F-4D97-AF65-F5344CB8AC3E}">
+        <p14:creationId xmlns:p14="http://schemas.microsoft.com/office/powerpoint/2010/main" val="1781927036"/>
       </p:ext>
     </p:extLst>
   </p:cSld>
